--- a/slides/9-rag.pptx
+++ b/slides/9-rag.pptx
@@ -5,7 +5,7 @@
     <p:sldMasterId id="2147483660" r:id="rId1"/>
   </p:sldMasterIdLst>
   <p:notesMasterIdLst>
-    <p:notesMasterId r:id="rId26"/>
+    <p:notesMasterId r:id="rId25"/>
   </p:notesMasterIdLst>
   <p:sldIdLst>
     <p:sldId id="256" r:id="rId2"/>
@@ -25,13 +25,12 @@
     <p:sldId id="290" r:id="rId16"/>
     <p:sldId id="291" r:id="rId17"/>
     <p:sldId id="298" r:id="rId18"/>
-    <p:sldId id="273" r:id="rId19"/>
-    <p:sldId id="300" r:id="rId20"/>
-    <p:sldId id="301" r:id="rId21"/>
-    <p:sldId id="302" r:id="rId22"/>
-    <p:sldId id="303" r:id="rId23"/>
-    <p:sldId id="304" r:id="rId24"/>
-    <p:sldId id="297" r:id="rId25"/>
+    <p:sldId id="300" r:id="rId19"/>
+    <p:sldId id="301" r:id="rId20"/>
+    <p:sldId id="302" r:id="rId21"/>
+    <p:sldId id="303" r:id="rId22"/>
+    <p:sldId id="304" r:id="rId23"/>
+    <p:sldId id="297" r:id="rId24"/>
   </p:sldIdLst>
   <p:sldSz cx="12192000" cy="6858000"/>
   <p:notesSz cx="6858000" cy="9144000"/>
@@ -598,7 +597,7 @@
           </a:lstStyle>
           <a:p>
             <a:fld id="{EDD32BBE-F3E8-43AA-A5B0-4B425A9CF33C}" type="datetimeFigureOut">
-              <a:t>9/23/2026</a:t>
+              <a:t>10/21/2026</a:t>
             </a:fld>
             <a:endParaRPr lang="en-GB"/>
           </a:p>
@@ -1111,7 +1110,7 @@
           <a:p>
             <a:fld id="{846CE7D5-CF57-46EF-B807-FDD0502418D4}" type="datetimeFigureOut">
               <a:rPr lang="en-GB" smtClean="0"/>
-              <a:t>23/09/2026</a:t>
+              <a:t>21/10/2026</a:t>
             </a:fld>
             <a:endParaRPr lang="en-GB"/>
           </a:p>
@@ -1281,7 +1280,7 @@
           <a:p>
             <a:fld id="{846CE7D5-CF57-46EF-B807-FDD0502418D4}" type="datetimeFigureOut">
               <a:rPr lang="en-GB" smtClean="0"/>
-              <a:t>23/09/2026</a:t>
+              <a:t>21/10/2026</a:t>
             </a:fld>
             <a:endParaRPr lang="en-GB"/>
           </a:p>
@@ -1461,7 +1460,7 @@
           <a:p>
             <a:fld id="{846CE7D5-CF57-46EF-B807-FDD0502418D4}" type="datetimeFigureOut">
               <a:rPr lang="en-GB" smtClean="0"/>
-              <a:t>23/09/2026</a:t>
+              <a:t>21/10/2026</a:t>
             </a:fld>
             <a:endParaRPr lang="en-GB"/>
           </a:p>
@@ -2007,7 +2006,7 @@
           <a:p>
             <a:fld id="{846CE7D5-CF57-46EF-B807-FDD0502418D4}" type="datetimeFigureOut">
               <a:rPr lang="en-GB" smtClean="0"/>
-              <a:t>23/09/2026</a:t>
+              <a:t>21/10/2026</a:t>
             </a:fld>
             <a:endParaRPr lang="en-GB"/>
           </a:p>
@@ -2253,7 +2252,7 @@
           <a:p>
             <a:fld id="{846CE7D5-CF57-46EF-B807-FDD0502418D4}" type="datetimeFigureOut">
               <a:rPr lang="en-GB" smtClean="0"/>
-              <a:t>23/09/2026</a:t>
+              <a:t>21/10/2026</a:t>
             </a:fld>
             <a:endParaRPr lang="en-GB"/>
           </a:p>
@@ -2485,7 +2484,7 @@
           <a:p>
             <a:fld id="{846CE7D5-CF57-46EF-B807-FDD0502418D4}" type="datetimeFigureOut">
               <a:rPr lang="en-GB" smtClean="0"/>
-              <a:t>23/09/2026</a:t>
+              <a:t>21/10/2026</a:t>
             </a:fld>
             <a:endParaRPr lang="en-GB"/>
           </a:p>
@@ -2852,7 +2851,7 @@
           <a:p>
             <a:fld id="{846CE7D5-CF57-46EF-B807-FDD0502418D4}" type="datetimeFigureOut">
               <a:rPr lang="en-GB" smtClean="0"/>
-              <a:t>23/09/2026</a:t>
+              <a:t>21/10/2026</a:t>
             </a:fld>
             <a:endParaRPr lang="en-GB"/>
           </a:p>
@@ -2970,7 +2969,7 @@
           <a:p>
             <a:fld id="{846CE7D5-CF57-46EF-B807-FDD0502418D4}" type="datetimeFigureOut">
               <a:rPr lang="en-GB" smtClean="0"/>
-              <a:t>23/09/2026</a:t>
+              <a:t>21/10/2026</a:t>
             </a:fld>
             <a:endParaRPr lang="en-GB"/>
           </a:p>
@@ -3065,7 +3064,7 @@
           <a:p>
             <a:fld id="{846CE7D5-CF57-46EF-B807-FDD0502418D4}" type="datetimeFigureOut">
               <a:rPr lang="en-GB" smtClean="0"/>
-              <a:t>23/09/2026</a:t>
+              <a:t>21/10/2026</a:t>
             </a:fld>
             <a:endParaRPr lang="en-GB"/>
           </a:p>
@@ -3342,7 +3341,7 @@
           <a:p>
             <a:fld id="{846CE7D5-CF57-46EF-B807-FDD0502418D4}" type="datetimeFigureOut">
               <a:rPr lang="en-GB" smtClean="0"/>
-              <a:t>23/09/2026</a:t>
+              <a:t>21/10/2026</a:t>
             </a:fld>
             <a:endParaRPr lang="en-GB"/>
           </a:p>
@@ -3599,7 +3598,7 @@
           <a:p>
             <a:fld id="{846CE7D5-CF57-46EF-B807-FDD0502418D4}" type="datetimeFigureOut">
               <a:rPr lang="en-GB" smtClean="0"/>
-              <a:t>23/09/2026</a:t>
+              <a:t>21/10/2026</a:t>
             </a:fld>
             <a:endParaRPr lang="en-GB"/>
           </a:p>
@@ -3812,7 +3811,7 @@
           <a:p>
             <a:fld id="{846CE7D5-CF57-46EF-B807-FDD0502418D4}" type="datetimeFigureOut">
               <a:rPr lang="en-GB" smtClean="0"/>
-              <a:t>23/09/2026</a:t>
+              <a:t>21/10/2026</a:t>
             </a:fld>
             <a:endParaRPr lang="en-GB"/>
           </a:p>
@@ -4467,16 +4466,16 @@
             <a:custGeom>
               <a:avLst/>
               <a:gdLst>
-                <a:gd name="csX0" fmla="*/ 0 w 308800"/>
-                <a:gd name="csY0" fmla="*/ 249986 h 499971"/>
-                <a:gd name="csX1" fmla="*/ 154400 w 308800"/>
-                <a:gd name="csY1" fmla="*/ 0 h 499971"/>
-                <a:gd name="csX2" fmla="*/ 308800 w 308800"/>
-                <a:gd name="csY2" fmla="*/ 249986 h 499971"/>
-                <a:gd name="csX3" fmla="*/ 154400 w 308800"/>
-                <a:gd name="csY3" fmla="*/ 499972 h 499971"/>
-                <a:gd name="csX4" fmla="*/ 0 w 308800"/>
-                <a:gd name="csY4" fmla="*/ 249986 h 499971"/>
+                <a:gd name="csX0" fmla="*/ 0 w 723893"/>
+                <a:gd name="csY0" fmla="*/ 560144 h 1120287"/>
+                <a:gd name="csX1" fmla="*/ 361947 w 723893"/>
+                <a:gd name="csY1" fmla="*/ 0 h 1120287"/>
+                <a:gd name="csX2" fmla="*/ 723894 w 723893"/>
+                <a:gd name="csY2" fmla="*/ 560144 h 1120287"/>
+                <a:gd name="csX3" fmla="*/ 361947 w 723893"/>
+                <a:gd name="csY3" fmla="*/ 1120288 h 1120287"/>
+                <a:gd name="csX4" fmla="*/ 0 w 723893"/>
+                <a:gd name="csY4" fmla="*/ 560144 h 1120287"/>
               </a:gdLst>
               <a:ahLst/>
               <a:cxnLst>
@@ -4498,55 +4497,55 @@
               </a:cxnLst>
               <a:rect l="l" t="t" r="r" b="b"/>
               <a:pathLst>
-                <a:path w="308800" h="499971" fill="none" extrusionOk="0">
+                <a:path w="723893" h="1120287" fill="none" extrusionOk="0">
                   <a:moveTo>
-                    <a:pt x="0" y="249986"/>
+                    <a:pt x="0" y="560144"/>
                   </a:moveTo>
                   <a:cubicBezTo>
-                    <a:pt x="-1713" y="98789"/>
-                    <a:pt x="67590" y="11989"/>
-                    <a:pt x="154400" y="0"/>
+                    <a:pt x="-4275" y="218006"/>
+                    <a:pt x="161241" y="6306"/>
+                    <a:pt x="361947" y="0"/>
                   </a:cubicBezTo>
                   <a:cubicBezTo>
-                    <a:pt x="230040" y="-17159"/>
-                    <a:pt x="316277" y="124168"/>
-                    <a:pt x="308800" y="249986"/>
+                    <a:pt x="545784" y="-28608"/>
+                    <a:pt x="747236" y="289015"/>
+                    <a:pt x="723894" y="560144"/>
                   </a:cubicBezTo>
                   <a:cubicBezTo>
-                    <a:pt x="310220" y="390672"/>
-                    <a:pt x="238249" y="496562"/>
-                    <a:pt x="154400" y="499972"/>
+                    <a:pt x="742226" y="903357"/>
+                    <a:pt x="557931" y="1110911"/>
+                    <a:pt x="361947" y="1120288"/>
                   </a:cubicBezTo>
                   <a:cubicBezTo>
-                    <a:pt x="47804" y="497044"/>
-                    <a:pt x="-11381" y="391103"/>
-                    <a:pt x="0" y="249986"/>
+                    <a:pt x="135482" y="1116640"/>
+                    <a:pt x="-30271" y="877625"/>
+                    <a:pt x="0" y="560144"/>
                   </a:cubicBezTo>
                   <a:close/>
                 </a:path>
-                <a:path w="308800" h="499971" stroke="0" extrusionOk="0">
+                <a:path w="723893" h="1120287" stroke="0" extrusionOk="0">
                   <a:moveTo>
-                    <a:pt x="0" y="249986"/>
+                    <a:pt x="0" y="560144"/>
                   </a:moveTo>
                   <a:cubicBezTo>
-                    <a:pt x="-1739" y="92067"/>
-                    <a:pt x="55241" y="-11833"/>
-                    <a:pt x="154400" y="0"/>
+                    <a:pt x="-1766" y="230629"/>
+                    <a:pt x="125361" y="-31262"/>
+                    <a:pt x="361947" y="0"/>
                   </a:cubicBezTo>
                   <a:cubicBezTo>
-                    <a:pt x="241270" y="-5747"/>
-                    <a:pt x="298402" y="98541"/>
-                    <a:pt x="308800" y="249986"/>
+                    <a:pt x="567197" y="-19255"/>
+                    <a:pt x="706624" y="228558"/>
+                    <a:pt x="723894" y="560144"/>
                   </a:cubicBezTo>
                   <a:cubicBezTo>
-                    <a:pt x="307712" y="391045"/>
-                    <a:pt x="246358" y="498291"/>
-                    <a:pt x="154400" y="499972"/>
+                    <a:pt x="715492" y="892647"/>
+                    <a:pt x="600618" y="1110536"/>
+                    <a:pt x="361947" y="1120288"/>
                   </a:cubicBezTo>
                   <a:cubicBezTo>
-                    <a:pt x="75609" y="492145"/>
-                    <a:pt x="-17693" y="376488"/>
-                    <a:pt x="0" y="249986"/>
+                    <a:pt x="202916" y="1070941"/>
+                    <a:pt x="-30498" y="849575"/>
+                    <a:pt x="0" y="560144"/>
                   </a:cubicBezTo>
                   <a:close/>
                 </a:path>
@@ -4622,16 +4621,16 @@
             <a:custGeom>
               <a:avLst/>
               <a:gdLst>
-                <a:gd name="csX0" fmla="*/ 0 w 285933"/>
-                <a:gd name="csY0" fmla="*/ 319607 h 639213"/>
-                <a:gd name="csX1" fmla="*/ 142967 w 285933"/>
-                <a:gd name="csY1" fmla="*/ 0 h 639213"/>
-                <a:gd name="csX2" fmla="*/ 285934 w 285933"/>
-                <a:gd name="csY2" fmla="*/ 319607 h 639213"/>
-                <a:gd name="csX3" fmla="*/ 142967 w 285933"/>
-                <a:gd name="csY3" fmla="*/ 639214 h 639213"/>
-                <a:gd name="csX4" fmla="*/ 0 w 285933"/>
-                <a:gd name="csY4" fmla="*/ 319607 h 639213"/>
+                <a:gd name="csX0" fmla="*/ 0 w 670289"/>
+                <a:gd name="csY0" fmla="*/ 716144 h 1432288"/>
+                <a:gd name="csX1" fmla="*/ 335145 w 670289"/>
+                <a:gd name="csY1" fmla="*/ 0 h 1432288"/>
+                <a:gd name="csX2" fmla="*/ 670290 w 670289"/>
+                <a:gd name="csY2" fmla="*/ 716144 h 1432288"/>
+                <a:gd name="csX3" fmla="*/ 335145 w 670289"/>
+                <a:gd name="csY3" fmla="*/ 1432288 h 1432288"/>
+                <a:gd name="csX4" fmla="*/ 0 w 670289"/>
+                <a:gd name="csY4" fmla="*/ 716144 h 1432288"/>
               </a:gdLst>
               <a:ahLst/>
               <a:cxnLst>
@@ -4653,55 +4652,55 @@
               </a:cxnLst>
               <a:rect l="l" t="t" r="r" b="b"/>
               <a:pathLst>
-                <a:path w="285933" h="639213" fill="none" extrusionOk="0">
+                <a:path w="670289" h="1432288" fill="none" extrusionOk="0">
                   <a:moveTo>
-                    <a:pt x="0" y="319607"/>
+                    <a:pt x="0" y="716144"/>
                   </a:moveTo>
                   <a:cubicBezTo>
-                    <a:pt x="-856" y="136533"/>
-                    <a:pt x="61967" y="15930"/>
-                    <a:pt x="142967" y="0"/>
+                    <a:pt x="-4909" y="282989"/>
+                    <a:pt x="149451" y="4671"/>
+                    <a:pt x="335145" y="0"/>
                   </a:cubicBezTo>
                   <a:cubicBezTo>
-                    <a:pt x="210403" y="-20523"/>
-                    <a:pt x="291694" y="152526"/>
-                    <a:pt x="285934" y="319607"/>
+                    <a:pt x="479156" y="-73179"/>
+                    <a:pt x="715206" y="394194"/>
+                    <a:pt x="670290" y="716144"/>
                   </a:cubicBezTo>
                   <a:cubicBezTo>
-                    <a:pt x="289621" y="502930"/>
-                    <a:pt x="217269" y="628060"/>
-                    <a:pt x="142967" y="639214"/>
+                    <a:pt x="676417" y="1122974"/>
+                    <a:pt x="509915" y="1407553"/>
+                    <a:pt x="335145" y="1432288"/>
                   </a:cubicBezTo>
                   <a:cubicBezTo>
-                    <a:pt x="52877" y="637686"/>
-                    <a:pt x="-14357" y="499973"/>
-                    <a:pt x="0" y="319607"/>
+                    <a:pt x="137397" y="1430551"/>
+                    <a:pt x="-44516" y="1123603"/>
+                    <a:pt x="0" y="716144"/>
                   </a:cubicBezTo>
                   <a:close/>
                 </a:path>
-                <a:path w="285933" h="639213" stroke="0" extrusionOk="0">
+                <a:path w="670289" h="1432288" stroke="0" extrusionOk="0">
                   <a:moveTo>
-                    <a:pt x="0" y="319607"/>
+                    <a:pt x="0" y="716144"/>
                   </a:moveTo>
                   <a:cubicBezTo>
-                    <a:pt x="-1380" y="127344"/>
-                    <a:pt x="60220" y="-3229"/>
-                    <a:pt x="142967" y="0"/>
+                    <a:pt x="-1593" y="302446"/>
+                    <a:pt x="130692" y="-16495"/>
+                    <a:pt x="335145" y="0"/>
                   </a:cubicBezTo>
                   <a:cubicBezTo>
-                    <a:pt x="224100" y="-7826"/>
-                    <a:pt x="270048" y="122648"/>
-                    <a:pt x="285934" y="319607"/>
+                    <a:pt x="536846" y="-59747"/>
+                    <a:pt x="621202" y="257453"/>
+                    <a:pt x="670290" y="716144"/>
                   </a:cubicBezTo>
                   <a:cubicBezTo>
-                    <a:pt x="283682" y="502325"/>
-                    <a:pt x="238336" y="635086"/>
-                    <a:pt x="142967" y="639214"/>
+                    <a:pt x="657248" y="1147583"/>
+                    <a:pt x="535028" y="1428569"/>
+                    <a:pt x="335145" y="1432288"/>
                   </a:cubicBezTo>
                   <a:cubicBezTo>
-                    <a:pt x="86688" y="611829"/>
-                    <a:pt x="-4390" y="493252"/>
-                    <a:pt x="0" y="319607"/>
+                    <a:pt x="177178" y="1399531"/>
+                    <a:pt x="-42805" y="1083690"/>
+                    <a:pt x="0" y="716144"/>
                   </a:cubicBezTo>
                   <a:close/>
                 </a:path>
@@ -8255,91 +8254,6 @@
   <p:cSld>
     <p:spTree>
       <p:nvGrpSpPr>
-        <p:cNvPr id="1" name=""/>
-        <p:cNvGrpSpPr/>
-        <p:nvPr/>
-      </p:nvGrpSpPr>
-      <p:grpSpPr>
-        <a:xfrm>
-          <a:off x="0" y="0"/>
-          <a:ext cx="0" cy="0"/>
-          <a:chOff x="0" y="0"/>
-          <a:chExt cx="0" cy="0"/>
-        </a:xfrm>
-      </p:grpSpPr>
-      <p:sp>
-        <p:nvSpPr>
-          <p:cNvPr id="2" name="Title 1">
-            <a:extLst>
-              <a:ext uri="{FF2B5EF4-FFF2-40B4-BE49-F238E27FC236}">
-                <a16:creationId xmlns:a16="http://schemas.microsoft.com/office/drawing/2014/main" id="{FB9288F3-BDF6-DBE9-533A-7E304767931F}"/>
-              </a:ext>
-            </a:extLst>
-          </p:cNvPr>
-          <p:cNvSpPr>
-            <a:spLocks noGrp="1"/>
-          </p:cNvSpPr>
-          <p:nvPr>
-            <p:ph type="title"/>
-          </p:nvPr>
-        </p:nvSpPr>
-        <p:spPr/>
-        <p:txBody>
-          <a:bodyPr/>
-          <a:lstStyle/>
-          <a:p>
-            <a:r>
-              <a:rPr lang="en-GB" dirty="0"/>
-              <a:t>LLM POV</a:t>
-            </a:r>
-          </a:p>
-        </p:txBody>
-      </p:sp>
-      <p:sp>
-        <p:nvSpPr>
-          <p:cNvPr id="3" name="Content Placeholder 2">
-            <a:extLst>
-              <a:ext uri="{FF2B5EF4-FFF2-40B4-BE49-F238E27FC236}">
-                <a16:creationId xmlns:a16="http://schemas.microsoft.com/office/drawing/2014/main" id="{8DE1E9CB-5E70-5E71-3090-6D63369CA786}"/>
-              </a:ext>
-            </a:extLst>
-          </p:cNvPr>
-          <p:cNvSpPr>
-            <a:spLocks noGrp="1"/>
-          </p:cNvSpPr>
-          <p:nvPr>
-            <p:ph idx="1"/>
-          </p:nvPr>
-        </p:nvSpPr>
-        <p:spPr/>
-        <p:txBody>
-          <a:bodyPr vert="horz" lIns="91440" tIns="45720" rIns="91440" bIns="45720" rtlCol="0" anchor="t">
-            <a:normAutofit/>
-          </a:bodyPr>
-          <a:lstStyle/>
-          <a:p>
-            <a:endParaRPr lang="en-GB" dirty="0"/>
-          </a:p>
-        </p:txBody>
-      </p:sp>
-    </p:spTree>
-    <p:extLst>
-      <p:ext uri="{BB962C8B-B14F-4D97-AF65-F5344CB8AC3E}">
-        <p14:creationId xmlns:p14="http://schemas.microsoft.com/office/powerpoint/2010/main" val="2210593182"/>
-      </p:ext>
-    </p:extLst>
-  </p:cSld>
-  <p:clrMapOvr>
-    <a:masterClrMapping/>
-  </p:clrMapOvr>
-</p:sld>
-</file>
-
-<file path=ppt/slides/slide19.xml><?xml version="1.0" encoding="utf-8"?>
-<p:sld xmlns:a="http://schemas.openxmlformats.org/drawingml/2006/main" xmlns:r="http://schemas.openxmlformats.org/officeDocument/2006/relationships" xmlns:p="http://schemas.openxmlformats.org/presentationml/2006/main">
-  <p:cSld>
-    <p:spTree>
-      <p:nvGrpSpPr>
         <p:cNvPr id="1" name="">
           <a:extLst>
             <a:ext uri="{FF2B5EF4-FFF2-40B4-BE49-F238E27FC236}">
@@ -8411,7 +8325,7 @@
           <a:p>
             <a:r>
               <a:rPr lang="en-GB" dirty="0"/>
-              <a:t>User wants me to calculate 2324 times 1313...</a:t>
+              <a:t>User wants me to calculate 2324 plus 1313...</a:t>
             </a:r>
           </a:p>
         </p:txBody>
@@ -8429,221 +8343,7 @@
 </p:sld>
 </file>
 
-<file path=ppt/slides/slide2.xml><?xml version="1.0" encoding="utf-8"?>
-<p:sld xmlns:a="http://schemas.openxmlformats.org/drawingml/2006/main" xmlns:r="http://schemas.openxmlformats.org/officeDocument/2006/relationships" xmlns:p="http://schemas.openxmlformats.org/presentationml/2006/main">
-  <p:cSld>
-    <p:spTree>
-      <p:nvGrpSpPr>
-        <p:cNvPr id="1" name=""/>
-        <p:cNvGrpSpPr/>
-        <p:nvPr/>
-      </p:nvGrpSpPr>
-      <p:grpSpPr>
-        <a:xfrm>
-          <a:off x="0" y="0"/>
-          <a:ext cx="0" cy="0"/>
-          <a:chOff x="0" y="0"/>
-          <a:chExt cx="0" cy="0"/>
-        </a:xfrm>
-      </p:grpSpPr>
-      <p:sp>
-        <p:nvSpPr>
-          <p:cNvPr id="2" name="Title 1">
-            <a:extLst>
-              <a:ext uri="{FF2B5EF4-FFF2-40B4-BE49-F238E27FC236}">
-                <a16:creationId xmlns:a16="http://schemas.microsoft.com/office/drawing/2014/main" id="{765694F5-3DF7-8763-1C92-8C5D4FACC121}"/>
-              </a:ext>
-            </a:extLst>
-          </p:cNvPr>
-          <p:cNvSpPr>
-            <a:spLocks noGrp="1"/>
-          </p:cNvSpPr>
-          <p:nvPr>
-            <p:ph type="title"/>
-          </p:nvPr>
-        </p:nvSpPr>
-        <p:spPr/>
-        <p:txBody>
-          <a:bodyPr/>
-          <a:lstStyle/>
-          <a:p>
-            <a:r>
-              <a:rPr lang="en-GB" dirty="0"/>
-              <a:t>Back to the kitchen</a:t>
-            </a:r>
-          </a:p>
-        </p:txBody>
-      </p:sp>
-      <p:sp>
-        <p:nvSpPr>
-          <p:cNvPr id="3" name="Content Placeholder 2">
-            <a:extLst>
-              <a:ext uri="{FF2B5EF4-FFF2-40B4-BE49-F238E27FC236}">
-                <a16:creationId xmlns:a16="http://schemas.microsoft.com/office/drawing/2014/main" id="{B8A2436E-9097-316C-AE3B-BAE2E3CA19AE}"/>
-              </a:ext>
-            </a:extLst>
-          </p:cNvPr>
-          <p:cNvSpPr>
-            <a:spLocks noGrp="1"/>
-          </p:cNvSpPr>
-          <p:nvPr>
-            <p:ph idx="1"/>
-          </p:nvPr>
-        </p:nvSpPr>
-        <p:spPr/>
-        <p:txBody>
-          <a:bodyPr vert="horz" lIns="91440" tIns="45720" rIns="91440" bIns="45720" rtlCol="0" anchor="t">
-            <a:normAutofit/>
-          </a:bodyPr>
-          <a:lstStyle/>
-          <a:p>
-            <a:pPr>
-              <a:buNone/>
-            </a:pPr>
-            <a:endParaRPr lang="en-GB" sz="1800" dirty="0">
-              <a:solidFill>
-                <a:srgbClr val="0B7743"/>
-              </a:solidFill>
-              <a:latin typeface="Source Code Pro"/>
-              <a:ea typeface="Source Code Pro"/>
-            </a:endParaRPr>
-          </a:p>
-          <a:p>
-            <a:pPr>
-              <a:buNone/>
-            </a:pPr>
-            <a:endParaRPr lang="en-GB" sz="1800" dirty="0">
-              <a:solidFill>
-                <a:srgbClr val="0B7743"/>
-              </a:solidFill>
-              <a:latin typeface="Source Code Pro"/>
-              <a:ea typeface="Source Code Pro"/>
-            </a:endParaRPr>
-          </a:p>
-          <a:p>
-            <a:pPr>
-              <a:buNone/>
-            </a:pPr>
-            <a:r>
-              <a:rPr lang="en-GB" sz="1800" dirty="0">
-                <a:solidFill>
-                  <a:srgbClr val="0B7743"/>
-                </a:solidFill>
-                <a:latin typeface="Source Code Pro"/>
-                <a:ea typeface="Source Code Pro"/>
-              </a:rPr>
-              <a:t>‘system’</a:t>
-            </a:r>
-            <a:r>
-              <a:rPr lang="en-GB" sz="1800" dirty="0">
-                <a:solidFill>
-                  <a:srgbClr val="666666"/>
-                </a:solidFill>
-                <a:latin typeface="Source Code Pro"/>
-                <a:ea typeface="Source Code Pro"/>
-              </a:rPr>
-              <a:t>    : </a:t>
-            </a:r>
-            <a:r>
-              <a:rPr lang="en-GB" sz="1800" dirty="0">
-                <a:solidFill>
-                  <a:srgbClr val="9325A5"/>
-                </a:solidFill>
-                <a:latin typeface="Source Code Pro"/>
-                <a:ea typeface="Source Code Pro"/>
-              </a:rPr>
-              <a:t>“You are an expert in baking.”</a:t>
-            </a:r>
-            <a:endParaRPr lang="en-GB"/>
-          </a:p>
-          <a:p>
-            <a:pPr>
-              <a:buNone/>
-            </a:pPr>
-            <a:r>
-              <a:rPr lang="en-GB" sz="1800" dirty="0">
-                <a:solidFill>
-                  <a:srgbClr val="0B7743"/>
-                </a:solidFill>
-                <a:latin typeface="Source Code Pro"/>
-                <a:ea typeface="Source Code Pro"/>
-              </a:rPr>
-              <a:t>‘user’</a:t>
-            </a:r>
-            <a:r>
-              <a:rPr lang="en-GB" sz="1800" dirty="0">
-                <a:solidFill>
-                  <a:srgbClr val="666666"/>
-                </a:solidFill>
-                <a:latin typeface="Source Code Pro"/>
-                <a:ea typeface="Source Code Pro"/>
-              </a:rPr>
-              <a:t>      : </a:t>
-            </a:r>
-            <a:r>
-              <a:rPr lang="en-GB" sz="1800" dirty="0">
-                <a:solidFill>
-                  <a:srgbClr val="9325A5"/>
-                </a:solidFill>
-                <a:latin typeface="Source Code Pro"/>
-                <a:ea typeface="Source Code Pro"/>
-              </a:rPr>
-              <a:t>“Provide me a recipe for macarons.”</a:t>
-            </a:r>
-            <a:endParaRPr lang="en-GB"/>
-          </a:p>
-          <a:p>
-            <a:pPr marL="0" indent="0">
-              <a:buNone/>
-            </a:pPr>
-            <a:r>
-              <a:rPr lang="en-GB" sz="1800" dirty="0">
-                <a:solidFill>
-                  <a:srgbClr val="0B7743"/>
-                </a:solidFill>
-                <a:latin typeface="Source Code Pro"/>
-                <a:ea typeface="Source Code Pro"/>
-              </a:rPr>
-              <a:t>‘assistant’</a:t>
-            </a:r>
-            <a:r>
-              <a:rPr lang="en-GB" sz="1800" dirty="0">
-                <a:solidFill>
-                  <a:srgbClr val="666666"/>
-                </a:solidFill>
-                <a:latin typeface="Source Code Pro"/>
-                <a:ea typeface="Source Code Pro"/>
-              </a:rPr>
-              <a:t> : </a:t>
-            </a:r>
-            <a:r>
-              <a:rPr lang="en-GB" sz="1800" dirty="0">
-                <a:solidFill>
-                  <a:srgbClr val="9325A5"/>
-                </a:solidFill>
-                <a:latin typeface="Source Code Pro"/>
-                <a:ea typeface="Source Code Pro"/>
-              </a:rPr>
-              <a:t>“Certainly! Here is a recipe for macarons …”</a:t>
-            </a:r>
-            <a:endParaRPr lang="en-GB" dirty="0"/>
-          </a:p>
-        </p:txBody>
-      </p:sp>
-    </p:spTree>
-    <p:extLst>
-      <p:ext uri="{BB962C8B-B14F-4D97-AF65-F5344CB8AC3E}">
-        <p14:creationId xmlns:p14="http://schemas.microsoft.com/office/powerpoint/2010/main" val="3614625065"/>
-      </p:ext>
-    </p:extLst>
-  </p:cSld>
-  <p:clrMapOvr>
-    <a:masterClrMapping/>
-  </p:clrMapOvr>
-</p:sld>
-</file>
-
-<file path=ppt/slides/slide20.xml><?xml version="1.0" encoding="utf-8"?>
+<file path=ppt/slides/slide19.xml><?xml version="1.0" encoding="utf-8"?>
 <p:sld xmlns:a="http://schemas.openxmlformats.org/drawingml/2006/main" xmlns:r="http://schemas.openxmlformats.org/officeDocument/2006/relationships" xmlns:p="http://schemas.openxmlformats.org/presentationml/2006/main">
   <p:cSld>
     <p:spTree>
@@ -8719,7 +8419,7 @@
           <a:p>
             <a:r>
               <a:rPr lang="en-GB" dirty="0"/>
-              <a:t>User wants me to calculate 2324 times 1313, I will call my calculator tool. &lt;|{tool: "calculator", argument: "2324+1313"}|&gt;</a:t>
+              <a:t>User wants me to calculate 2324 plus 1313, I will call my calculator tool. &lt;|{tool: "calculator", argument: "2324+1313"}|&gt;</a:t>
             </a:r>
           </a:p>
           <a:p>
@@ -8848,7 +8548,221 @@
 </p:sld>
 </file>
 
-<file path=ppt/slides/slide21.xml><?xml version="1.0" encoding="utf-8"?>
+<file path=ppt/slides/slide2.xml><?xml version="1.0" encoding="utf-8"?>
+<p:sld xmlns:a="http://schemas.openxmlformats.org/drawingml/2006/main" xmlns:r="http://schemas.openxmlformats.org/officeDocument/2006/relationships" xmlns:p="http://schemas.openxmlformats.org/presentationml/2006/main">
+  <p:cSld>
+    <p:spTree>
+      <p:nvGrpSpPr>
+        <p:cNvPr id="1" name=""/>
+        <p:cNvGrpSpPr/>
+        <p:nvPr/>
+      </p:nvGrpSpPr>
+      <p:grpSpPr>
+        <a:xfrm>
+          <a:off x="0" y="0"/>
+          <a:ext cx="0" cy="0"/>
+          <a:chOff x="0" y="0"/>
+          <a:chExt cx="0" cy="0"/>
+        </a:xfrm>
+      </p:grpSpPr>
+      <p:sp>
+        <p:nvSpPr>
+          <p:cNvPr id="2" name="Title 1">
+            <a:extLst>
+              <a:ext uri="{FF2B5EF4-FFF2-40B4-BE49-F238E27FC236}">
+                <a16:creationId xmlns:a16="http://schemas.microsoft.com/office/drawing/2014/main" id="{765694F5-3DF7-8763-1C92-8C5D4FACC121}"/>
+              </a:ext>
+            </a:extLst>
+          </p:cNvPr>
+          <p:cNvSpPr>
+            <a:spLocks noGrp="1"/>
+          </p:cNvSpPr>
+          <p:nvPr>
+            <p:ph type="title"/>
+          </p:nvPr>
+        </p:nvSpPr>
+        <p:spPr/>
+        <p:txBody>
+          <a:bodyPr/>
+          <a:lstStyle/>
+          <a:p>
+            <a:r>
+              <a:rPr lang="en-GB" dirty="0"/>
+              <a:t>Back to the kitchen</a:t>
+            </a:r>
+          </a:p>
+        </p:txBody>
+      </p:sp>
+      <p:sp>
+        <p:nvSpPr>
+          <p:cNvPr id="3" name="Content Placeholder 2">
+            <a:extLst>
+              <a:ext uri="{FF2B5EF4-FFF2-40B4-BE49-F238E27FC236}">
+                <a16:creationId xmlns:a16="http://schemas.microsoft.com/office/drawing/2014/main" id="{B8A2436E-9097-316C-AE3B-BAE2E3CA19AE}"/>
+              </a:ext>
+            </a:extLst>
+          </p:cNvPr>
+          <p:cNvSpPr>
+            <a:spLocks noGrp="1"/>
+          </p:cNvSpPr>
+          <p:nvPr>
+            <p:ph idx="1"/>
+          </p:nvPr>
+        </p:nvSpPr>
+        <p:spPr/>
+        <p:txBody>
+          <a:bodyPr vert="horz" lIns="91440" tIns="45720" rIns="91440" bIns="45720" rtlCol="0" anchor="t">
+            <a:normAutofit/>
+          </a:bodyPr>
+          <a:lstStyle/>
+          <a:p>
+            <a:pPr>
+              <a:buNone/>
+            </a:pPr>
+            <a:endParaRPr lang="en-GB" sz="1800" dirty="0">
+              <a:solidFill>
+                <a:srgbClr val="0B7743"/>
+              </a:solidFill>
+              <a:latin typeface="Source Code Pro"/>
+              <a:ea typeface="Source Code Pro"/>
+            </a:endParaRPr>
+          </a:p>
+          <a:p>
+            <a:pPr>
+              <a:buNone/>
+            </a:pPr>
+            <a:endParaRPr lang="en-GB" sz="1800" dirty="0">
+              <a:solidFill>
+                <a:srgbClr val="0B7743"/>
+              </a:solidFill>
+              <a:latin typeface="Source Code Pro"/>
+              <a:ea typeface="Source Code Pro"/>
+            </a:endParaRPr>
+          </a:p>
+          <a:p>
+            <a:pPr>
+              <a:buNone/>
+            </a:pPr>
+            <a:r>
+              <a:rPr lang="en-GB" sz="1800" dirty="0">
+                <a:solidFill>
+                  <a:srgbClr val="0B7743"/>
+                </a:solidFill>
+                <a:latin typeface="Source Code Pro"/>
+                <a:ea typeface="Source Code Pro"/>
+              </a:rPr>
+              <a:t>‘system’</a:t>
+            </a:r>
+            <a:r>
+              <a:rPr lang="en-GB" sz="1800" dirty="0">
+                <a:solidFill>
+                  <a:srgbClr val="666666"/>
+                </a:solidFill>
+                <a:latin typeface="Source Code Pro"/>
+                <a:ea typeface="Source Code Pro"/>
+              </a:rPr>
+              <a:t>    : </a:t>
+            </a:r>
+            <a:r>
+              <a:rPr lang="en-GB" sz="1800" dirty="0">
+                <a:solidFill>
+                  <a:srgbClr val="9325A5"/>
+                </a:solidFill>
+                <a:latin typeface="Source Code Pro"/>
+                <a:ea typeface="Source Code Pro"/>
+              </a:rPr>
+              <a:t>“You are an expert in baking.”</a:t>
+            </a:r>
+            <a:endParaRPr lang="en-GB"/>
+          </a:p>
+          <a:p>
+            <a:pPr>
+              <a:buNone/>
+            </a:pPr>
+            <a:r>
+              <a:rPr lang="en-GB" sz="1800" dirty="0">
+                <a:solidFill>
+                  <a:srgbClr val="0B7743"/>
+                </a:solidFill>
+                <a:latin typeface="Source Code Pro"/>
+                <a:ea typeface="Source Code Pro"/>
+              </a:rPr>
+              <a:t>‘user’</a:t>
+            </a:r>
+            <a:r>
+              <a:rPr lang="en-GB" sz="1800" dirty="0">
+                <a:solidFill>
+                  <a:srgbClr val="666666"/>
+                </a:solidFill>
+                <a:latin typeface="Source Code Pro"/>
+                <a:ea typeface="Source Code Pro"/>
+              </a:rPr>
+              <a:t>      : </a:t>
+            </a:r>
+            <a:r>
+              <a:rPr lang="en-GB" sz="1800" dirty="0">
+                <a:solidFill>
+                  <a:srgbClr val="9325A5"/>
+                </a:solidFill>
+                <a:latin typeface="Source Code Pro"/>
+                <a:ea typeface="Source Code Pro"/>
+              </a:rPr>
+              <a:t>“Provide me a recipe for macarons.”</a:t>
+            </a:r>
+            <a:endParaRPr lang="en-GB"/>
+          </a:p>
+          <a:p>
+            <a:pPr marL="0" indent="0">
+              <a:buNone/>
+            </a:pPr>
+            <a:r>
+              <a:rPr lang="en-GB" sz="1800" dirty="0">
+                <a:solidFill>
+                  <a:srgbClr val="0B7743"/>
+                </a:solidFill>
+                <a:latin typeface="Source Code Pro"/>
+                <a:ea typeface="Source Code Pro"/>
+              </a:rPr>
+              <a:t>‘assistant’</a:t>
+            </a:r>
+            <a:r>
+              <a:rPr lang="en-GB" sz="1800" dirty="0">
+                <a:solidFill>
+                  <a:srgbClr val="666666"/>
+                </a:solidFill>
+                <a:latin typeface="Source Code Pro"/>
+                <a:ea typeface="Source Code Pro"/>
+              </a:rPr>
+              <a:t> : </a:t>
+            </a:r>
+            <a:r>
+              <a:rPr lang="en-GB" sz="1800" dirty="0">
+                <a:solidFill>
+                  <a:srgbClr val="9325A5"/>
+                </a:solidFill>
+                <a:latin typeface="Source Code Pro"/>
+                <a:ea typeface="Source Code Pro"/>
+              </a:rPr>
+              <a:t>“Certainly! Here is a recipe for macarons …”</a:t>
+            </a:r>
+            <a:endParaRPr lang="en-GB" dirty="0"/>
+          </a:p>
+        </p:txBody>
+      </p:sp>
+    </p:spTree>
+    <p:extLst>
+      <p:ext uri="{BB962C8B-B14F-4D97-AF65-F5344CB8AC3E}">
+        <p14:creationId xmlns:p14="http://schemas.microsoft.com/office/powerpoint/2010/main" val="3614625065"/>
+      </p:ext>
+    </p:extLst>
+  </p:cSld>
+  <p:clrMapOvr>
+    <a:masterClrMapping/>
+  </p:clrMapOvr>
+</p:sld>
+</file>
+
+<file path=ppt/slides/slide20.xml><?xml version="1.0" encoding="utf-8"?>
 <p:sld xmlns:a="http://schemas.openxmlformats.org/drawingml/2006/main" xmlns:r="http://schemas.openxmlformats.org/officeDocument/2006/relationships" xmlns:p="http://schemas.openxmlformats.org/presentationml/2006/main">
   <p:cSld>
     <p:spTree>
@@ -8924,7 +8838,7 @@
           <a:p>
             <a:r>
               <a:rPr lang="en-GB" dirty="0"/>
-              <a:t>User wants me to calculate 2324 times 1313, I will call my calculator tool. &lt;|{tool: "calculator", argument: "2324+1313"}|&gt; </a:t>
+              <a:t>User wants me to calculate 2324 plus 1313, I will call my calculator tool. &lt;|{tool: "calculator", argument: "2324+1313"}|&gt; </a:t>
             </a:r>
             <a:endParaRPr lang="en-GB" dirty="0">
               <a:solidFill>
@@ -9081,7 +8995,7 @@
 </p:sld>
 </file>
 
-<file path=ppt/slides/slide22.xml><?xml version="1.0" encoding="utf-8"?>
+<file path=ppt/slides/slide21.xml><?xml version="1.0" encoding="utf-8"?>
 <p:sld xmlns:a="http://schemas.openxmlformats.org/drawingml/2006/main" xmlns:r="http://schemas.openxmlformats.org/officeDocument/2006/relationships" xmlns:p="http://schemas.openxmlformats.org/presentationml/2006/main">
   <p:cSld>
     <p:spTree>
@@ -9157,7 +9071,7 @@
           <a:p>
             <a:r>
               <a:rPr lang="en-GB" dirty="0"/>
-              <a:t>User wants me to calculate 2324 times 1313, I will call my calculator tool. &lt;|{tool: "calculator", argument: "2324+1313"}|&gt; </a:t>
+              <a:t>User wants me to calculate 2324 plus 1313, I will call my calculator tool. &lt;|{tool: "calculator", argument: "2324+1313"}|&gt; </a:t>
             </a:r>
             <a:r>
               <a:rPr lang="en-GB" dirty="0">
@@ -9197,7 +9111,7 @@
 </p:sld>
 </file>
 
-<file path=ppt/slides/slide23.xml><?xml version="1.0" encoding="utf-8"?>
+<file path=ppt/slides/slide22.xml><?xml version="1.0" encoding="utf-8"?>
 <p:sld xmlns:a="http://schemas.openxmlformats.org/drawingml/2006/main" xmlns:r="http://schemas.openxmlformats.org/officeDocument/2006/relationships" xmlns:p="http://schemas.openxmlformats.org/presentationml/2006/main">
   <p:cSld>
     <p:spTree>
@@ -9315,7 +9229,7 @@
 </p:sld>
 </file>
 
-<file path=ppt/slides/slide24.xml><?xml version="1.0" encoding="utf-8"?>
+<file path=ppt/slides/slide23.xml><?xml version="1.0" encoding="utf-8"?>
 <p:sld xmlns:a="http://schemas.openxmlformats.org/drawingml/2006/main" xmlns:r="http://schemas.openxmlformats.org/officeDocument/2006/relationships" xmlns:p="http://schemas.openxmlformats.org/presentationml/2006/main">
   <p:cSld>
     <p:spTree>
@@ -9442,6 +9356,36 @@
           <a:xfrm>
             <a:off x="1104900" y="3554010"/>
             <a:ext cx="6923778" cy="802020"/>
+          </a:xfrm>
+          <a:prstGeom prst="rect">
+            <a:avLst/>
+          </a:prstGeom>
+        </p:spPr>
+      </p:pic>
+      <p:pic>
+        <p:nvPicPr>
+          <p:cNvPr id="5" name="Picture 4">
+            <a:extLst>
+              <a:ext uri="{FF2B5EF4-FFF2-40B4-BE49-F238E27FC236}">
+                <a16:creationId xmlns:a16="http://schemas.microsoft.com/office/drawing/2014/main" id="{0C912BAE-24A3-976D-6359-B41132F4502E}"/>
+              </a:ext>
+            </a:extLst>
+          </p:cNvPr>
+          <p:cNvPicPr>
+            <a:picLocks noChangeAspect="1"/>
+          </p:cNvPicPr>
+          <p:nvPr/>
+        </p:nvPicPr>
+        <p:blipFill>
+          <a:blip r:embed="rId3"/>
+          <a:stretch>
+            <a:fillRect/>
+          </a:stretch>
+        </p:blipFill>
+        <p:spPr>
+          <a:xfrm>
+            <a:off x="1104900" y="4910371"/>
+            <a:ext cx="6548967" cy="1174044"/>
           </a:xfrm>
           <a:prstGeom prst="rect">
             <a:avLst/>
